--- a/autoCreatedFiles/01_GTIN_en.pptx
+++ b/autoCreatedFiles/01_GTIN_en.pptx
@@ -1596,7 +1596,7 @@
         </p:nvSpPr>
         <p:spPr>
           <a:xfrm>
-            <a:off x="747713" y="2181195"/>
+            <a:off x="747713" y="923895"/>
             <a:ext cx="11291888" cy="684907"/>
           </a:xfrm>
           <a:prstGeom prst="rect">
@@ -1638,7 +1638,7 @@
         </p:nvSpPr>
         <p:spPr>
           <a:xfrm>
-            <a:off x="747713" y="3004691"/>
+            <a:off x="747713" y="1747391"/>
             <a:ext cx="6952804" cy="828675"/>
           </a:xfrm>
           <a:prstGeom prst="rect">
@@ -1706,7 +1706,7 @@
         </p:nvSpPr>
         <p:spPr>
           <a:xfrm>
-            <a:off x="747713" y="3985766"/>
+            <a:off x="747713" y="2728466"/>
             <a:ext cx="7300444" cy="414338"/>
           </a:xfrm>
           <a:prstGeom prst="rect">
@@ -1740,6 +1740,36 @@
           </a:p>
         </p:txBody>
       </p:sp>
+      <p:pic>
+        <p:nvPicPr>
+          <p:cNvPr id="5" name="Image 0" descr="preencoded.png">    </p:cNvPr>
+          <p:cNvPicPr>
+            <a:picLocks noChangeAspect="1"/>
+          </p:cNvPicPr>
+          <p:nvPr/>
+        </p:nvPicPr>
+        <p:blipFill>
+          <a:blip r:embed="rId1">
+            <a:extLst>
+              <a:ext uri="{96DAC541-7B7A-43D3-8B79-37D633B846F1}">
+                <asvg:svgBlip xmlns:asvg="http://schemas.microsoft.com/office/drawing/2016/SVG/main" r:embed="rId2"/>
+              </a:ext>
+            </a:extLst>
+          </a:blip>
+          <a:stretch>
+            <a:fillRect/>
+          </a:stretch>
+        </p:blipFill>
+        <p:spPr>
+          <a:xfrm>
+            <a:off x="8483798" y="1816447"/>
+            <a:ext cx="2177058" cy="3810000"/>
+          </a:xfrm>
+          <a:prstGeom prst="rect">
+            <a:avLst/>
+          </a:prstGeom>
+        </p:spPr>
+      </p:pic>
       <p:sp>
         <p:nvSpPr>
           <p:cNvPr id="25" name="Slide Number Placeholder 0"/>
@@ -3724,7 +3754,7 @@
         </p:nvSpPr>
         <p:spPr>
           <a:xfrm>
-            <a:off x="747713" y="2255699"/>
+            <a:off x="747713" y="1698486"/>
             <a:ext cx="11291888" cy="556468"/>
           </a:xfrm>
           <a:prstGeom prst="rect">
@@ -3766,7 +3796,7 @@
         </p:nvSpPr>
         <p:spPr>
           <a:xfrm>
-            <a:off x="747713" y="2940397"/>
+            <a:off x="747713" y="2383185"/>
             <a:ext cx="10696575" cy="981075"/>
           </a:xfrm>
           <a:prstGeom prst="rect">
@@ -3894,6 +3924,30 @@
           </a:p>
         </p:txBody>
       </p:sp>
+      <p:pic>
+        <p:nvPicPr>
+          <p:cNvPr id="4" name="Image 0" descr="preencoded.png">    </p:cNvPr>
+          <p:cNvPicPr>
+            <a:picLocks noChangeAspect="1"/>
+          </p:cNvPicPr>
+          <p:nvPr/>
+        </p:nvPicPr>
+        <p:blipFill>
+          <a:blip r:embed="rId1"/>
+          <a:stretch>
+            <a:fillRect/>
+          </a:stretch>
+        </p:blipFill>
+        <p:spPr>
+          <a:xfrm>
+            <a:off x="747713" y="3585716"/>
+            <a:ext cx="2740372" cy="1428750"/>
+          </a:xfrm>
+          <a:prstGeom prst="rect">
+            <a:avLst/>
+          </a:prstGeom>
+        </p:spPr>
+      </p:pic>
       <p:sp>
         <p:nvSpPr>
           <p:cNvPr id="25" name="Slide Number Placeholder 0"/>
@@ -3979,7 +4033,7 @@
         </p:nvSpPr>
         <p:spPr>
           <a:xfrm>
-            <a:off x="747713" y="1048405"/>
+            <a:off x="747713" y="729317"/>
             <a:ext cx="11291888" cy="556468"/>
           </a:xfrm>
           <a:prstGeom prst="rect">
@@ -4021,7 +4075,7 @@
         </p:nvSpPr>
         <p:spPr>
           <a:xfrm>
-            <a:off x="747713" y="1733104"/>
+            <a:off x="747713" y="1414016"/>
             <a:ext cx="10696575" cy="828675"/>
           </a:xfrm>
           <a:prstGeom prst="rect">
@@ -4063,7 +4117,7 @@
         </p:nvSpPr>
         <p:spPr>
           <a:xfrm>
-            <a:off x="747713" y="2714179"/>
+            <a:off x="747713" y="2395091"/>
             <a:ext cx="10696575" cy="828675"/>
           </a:xfrm>
           <a:prstGeom prst="rect">
@@ -4140,15 +4194,39 @@
           </a:p>
         </p:txBody>
       </p:sp>
-      <p:sp>
-        <p:nvSpPr>
-          <p:cNvPr id="5" name="Text 3"/>
+      <p:pic>
+        <p:nvPicPr>
+          <p:cNvPr id="5" name="Image 0" descr="preencoded.png">    </p:cNvPr>
+          <p:cNvPicPr>
+            <a:picLocks noChangeAspect="1"/>
+          </p:cNvPicPr>
+          <p:nvPr/>
+        </p:nvPicPr>
+        <p:blipFill>
+          <a:blip r:embed="rId1"/>
+          <a:stretch>
+            <a:fillRect/>
+          </a:stretch>
+        </p:blipFill>
+        <p:spPr>
+          <a:xfrm>
+            <a:off x="747713" y="3445222"/>
+            <a:ext cx="952500" cy="952500"/>
+          </a:xfrm>
+          <a:prstGeom prst="rect">
+            <a:avLst/>
+          </a:prstGeom>
+        </p:spPr>
+      </p:pic>
+      <p:sp>
+        <p:nvSpPr>
+          <p:cNvPr id="6" name="Text 3"/>
           <p:cNvSpPr/>
           <p:nvPr/>
         </p:nvSpPr>
         <p:spPr>
           <a:xfrm>
-            <a:off x="747713" y="4261991"/>
+            <a:off x="747713" y="4581079"/>
             <a:ext cx="11231404" cy="414338"/>
           </a:xfrm>
           <a:prstGeom prst="rect">
@@ -4184,13 +4262,13 @@
       </p:sp>
       <p:sp>
         <p:nvSpPr>
-          <p:cNvPr id="6" name="Text 4"/>
+          <p:cNvPr id="7" name="Text 4"/>
           <p:cNvSpPr/>
           <p:nvPr/>
         </p:nvSpPr>
         <p:spPr>
           <a:xfrm>
-            <a:off x="747713" y="4897785"/>
+            <a:off x="747713" y="5216872"/>
             <a:ext cx="10696575" cy="866775"/>
           </a:xfrm>
           <a:prstGeom prst="rect">
